--- a/02-精益培训/02-培训材料/03-领导力培训大纲.pptx
+++ b/02-精益培训/02-培训材料/03-领导力培训大纲.pptx
@@ -5584,7 +5584,7 @@
               </a:spcAft>
             </a:pPr>
             <a:r>
-              <a:t>  实例：某紧固件企业车间主任的日常标准作业</a:t>
+              <a:t>  实例：某制造企业车间主任的日常标准作业</a:t>
             </a:r>
             <a:r>
               <a:rPr sz="1500" b="0">
@@ -5894,7 +5894,7 @@
               </a:spcAft>
             </a:pPr>
             <a:r>
-              <a:t>  成功案例：某紧固件企业精益转型中管理层的关键作用</a:t>
+              <a:t>  成功案例：某制造企业精益转型中管理层的关键作用</a:t>
             </a:r>
             <a:r>
               <a:rPr sz="1500" b="0">
@@ -6918,26 +6918,26 @@
               </a:spcAft>
             </a:pPr>
             <a:r>
-              <a:t>  紧固件产品族选择方法</a:t>
-            </a:r>
-            <a:r>
-              <a:rPr sz="1500" b="0">
-                <a:solidFill>
-                  <a:srgbClr val="333333"/>
-                </a:solidFill>
-                <a:latin typeface="SimSun"/>
-              </a:rPr>
-              <a:t/>
-            </a:r>
-          </a:p>
-          <a:p>
-            <a:pPr>
-              <a:spcAft>
-                <a:spcPts val="400"/>
-              </a:spcAft>
-            </a:pPr>
-            <a:r>
-              <a:t>  紧固件生产典型工序的数据收集要点</a:t>
+              <a:t>  产品族选择方法</a:t>
+            </a:r>
+            <a:r>
+              <a:rPr sz="1500" b="0">
+                <a:solidFill>
+                  <a:srgbClr val="333333"/>
+                </a:solidFill>
+                <a:latin typeface="SimSun"/>
+              </a:rPr>
+              <a:t/>
+            </a:r>
+          </a:p>
+          <a:p>
+            <a:pPr>
+              <a:spcAft>
+                <a:spcPts val="400"/>
+              </a:spcAft>
+            </a:pPr>
+            <a:r>
+              <a:t>  产品生产典型工序的数据收集要点</a:t>
             </a:r>
             <a:r>
               <a:rPr sz="1500" b="0">
@@ -6978,7 +6978,7 @@
               </a:spcAft>
             </a:pPr>
             <a:r>
-              <a:t>  以某紧固件产品为例</a:t>
+              <a:t>  以某产品为例</a:t>
             </a:r>
             <a:r>
               <a:rPr sz="1500" b="0">
@@ -7228,7 +7228,7 @@
               </a:spcAft>
             </a:pPr>
             <a:r>
-              <a:t>  紧固件企业未来状态图示例</a:t>
+              <a:t>  制造企业未来状态图示例</a:t>
             </a:r>
             <a:r>
               <a:rPr sz="1500" b="0">
@@ -9678,7 +9678,7 @@
                           </a:solidFill>
                           <a:latin typeface="SimSun"/>
                         </a:rPr>
-                        <a:t>紧固件行业领导力案例</a:t>
+                        <a:t>制造业领导力案例</a:t>
                       </a:r>
                     </a:p>
                   </a:txBody>
@@ -10799,7 +10799,7 @@
               </a:spcAft>
             </a:pPr>
             <a:r>
-              <a:t>  《紧固件行业领导力案例集》（内部编制）</a:t>
+              <a:t>  《制造业领导力案例集》（内部编制）</a:t>
             </a:r>
             <a:r>
               <a:rPr sz="1500" b="0">
